--- a/document/MAS-UI.pptx
+++ b/document/MAS-UI.pptx
@@ -5,7 +5,7 @@
     <p:sldMasterId id="2147483648" r:id="rId1"/>
   </p:sldMasterIdLst>
   <p:notesMasterIdLst>
-    <p:notesMasterId r:id="rId25"/>
+    <p:notesMasterId r:id="rId27"/>
   </p:notesMasterIdLst>
   <p:sldIdLst>
     <p:sldId id="257" r:id="rId2"/>
@@ -31,6 +31,8 @@
     <p:sldId id="290" r:id="rId22"/>
     <p:sldId id="291" r:id="rId23"/>
     <p:sldId id="273" r:id="rId24"/>
+    <p:sldId id="293" r:id="rId25"/>
+    <p:sldId id="294" r:id="rId26"/>
   </p:sldIdLst>
   <p:sldSz cx="12192000" cy="6858000"/>
   <p:notesSz cx="6858000" cy="9144000"/>
@@ -219,7 +221,7 @@
           <a:p>
             <a:fld id="{39BCABF5-0E2C-44E8-B1E9-C479705C3948}" type="datetimeFigureOut">
               <a:rPr lang="ko-KR" altLang="en-US" smtClean="0"/>
-              <a:t>2025-11-26</a:t>
+              <a:t>2026-02-11</a:t>
             </a:fld>
             <a:endParaRPr lang="ko-KR" altLang="en-US"/>
           </a:p>
@@ -695,7 +697,7 @@
           <a:p>
             <a:fld id="{49DFE29B-93A1-40D1-A604-D00555902BE4}" type="datetimeFigureOut">
               <a:rPr lang="ko-KR" altLang="en-US" smtClean="0"/>
-              <a:t>2025-11-26</a:t>
+              <a:t>2026-02-11</a:t>
             </a:fld>
             <a:endParaRPr lang="ko-KR" altLang="en-US"/>
           </a:p>
@@ -893,7 +895,7 @@
           <a:p>
             <a:fld id="{49DFE29B-93A1-40D1-A604-D00555902BE4}" type="datetimeFigureOut">
               <a:rPr lang="ko-KR" altLang="en-US" smtClean="0"/>
-              <a:t>2025-11-26</a:t>
+              <a:t>2026-02-11</a:t>
             </a:fld>
             <a:endParaRPr lang="ko-KR" altLang="en-US"/>
           </a:p>
@@ -1101,7 +1103,7 @@
           <a:p>
             <a:fld id="{49DFE29B-93A1-40D1-A604-D00555902BE4}" type="datetimeFigureOut">
               <a:rPr lang="ko-KR" altLang="en-US" smtClean="0"/>
-              <a:t>2025-11-26</a:t>
+              <a:t>2026-02-11</a:t>
             </a:fld>
             <a:endParaRPr lang="ko-KR" altLang="en-US"/>
           </a:p>
@@ -4070,7 +4072,7 @@
           <a:p>
             <a:fld id="{49DFE29B-93A1-40D1-A604-D00555902BE4}" type="datetimeFigureOut">
               <a:rPr lang="ko-KR" altLang="en-US" smtClean="0"/>
-              <a:t>2025-11-26</a:t>
+              <a:t>2026-02-11</a:t>
             </a:fld>
             <a:endParaRPr lang="ko-KR" altLang="en-US"/>
           </a:p>
@@ -4345,7 +4347,7 @@
           <a:p>
             <a:fld id="{49DFE29B-93A1-40D1-A604-D00555902BE4}" type="datetimeFigureOut">
               <a:rPr lang="ko-KR" altLang="en-US" smtClean="0"/>
-              <a:t>2025-11-26</a:t>
+              <a:t>2026-02-11</a:t>
             </a:fld>
             <a:endParaRPr lang="ko-KR" altLang="en-US"/>
           </a:p>
@@ -4610,7 +4612,7 @@
           <a:p>
             <a:fld id="{49DFE29B-93A1-40D1-A604-D00555902BE4}" type="datetimeFigureOut">
               <a:rPr lang="ko-KR" altLang="en-US" smtClean="0"/>
-              <a:t>2025-11-26</a:t>
+              <a:t>2026-02-11</a:t>
             </a:fld>
             <a:endParaRPr lang="ko-KR" altLang="en-US"/>
           </a:p>
@@ -5022,7 +5024,7 @@
           <a:p>
             <a:fld id="{49DFE29B-93A1-40D1-A604-D00555902BE4}" type="datetimeFigureOut">
               <a:rPr lang="ko-KR" altLang="en-US" smtClean="0"/>
-              <a:t>2025-11-26</a:t>
+              <a:t>2026-02-11</a:t>
             </a:fld>
             <a:endParaRPr lang="ko-KR" altLang="en-US"/>
           </a:p>
@@ -5163,7 +5165,7 @@
           <a:p>
             <a:fld id="{49DFE29B-93A1-40D1-A604-D00555902BE4}" type="datetimeFigureOut">
               <a:rPr lang="ko-KR" altLang="en-US" smtClean="0"/>
-              <a:t>2025-11-26</a:t>
+              <a:t>2026-02-11</a:t>
             </a:fld>
             <a:endParaRPr lang="ko-KR" altLang="en-US"/>
           </a:p>
@@ -5276,7 +5278,7 @@
           <a:p>
             <a:fld id="{49DFE29B-93A1-40D1-A604-D00555902BE4}" type="datetimeFigureOut">
               <a:rPr lang="ko-KR" altLang="en-US" smtClean="0"/>
-              <a:t>2025-11-26</a:t>
+              <a:t>2026-02-11</a:t>
             </a:fld>
             <a:endParaRPr lang="ko-KR" altLang="en-US"/>
           </a:p>
@@ -5587,7 +5589,7 @@
           <a:p>
             <a:fld id="{49DFE29B-93A1-40D1-A604-D00555902BE4}" type="datetimeFigureOut">
               <a:rPr lang="ko-KR" altLang="en-US" smtClean="0"/>
-              <a:t>2025-11-26</a:t>
+              <a:t>2026-02-11</a:t>
             </a:fld>
             <a:endParaRPr lang="ko-KR" altLang="en-US"/>
           </a:p>
@@ -5875,7 +5877,7 @@
           <a:p>
             <a:fld id="{49DFE29B-93A1-40D1-A604-D00555902BE4}" type="datetimeFigureOut">
               <a:rPr lang="ko-KR" altLang="en-US" smtClean="0"/>
-              <a:t>2025-11-26</a:t>
+              <a:t>2026-02-11</a:t>
             </a:fld>
             <a:endParaRPr lang="ko-KR" altLang="en-US"/>
           </a:p>
@@ -6116,7 +6118,7 @@
           <a:p>
             <a:fld id="{49DFE29B-93A1-40D1-A604-D00555902BE4}" type="datetimeFigureOut">
               <a:rPr lang="ko-KR" altLang="en-US" smtClean="0"/>
-              <a:t>2025-11-26</a:t>
+              <a:t>2026-02-11</a:t>
             </a:fld>
             <a:endParaRPr lang="ko-KR" altLang="en-US"/>
           </a:p>
@@ -12210,6 +12212,918 @@
     <p:extLst>
       <p:ext uri="{BB962C8B-B14F-4D97-AF65-F5344CB8AC3E}">
         <p14:creationId xmlns:p14="http://schemas.microsoft.com/office/powerpoint/2010/main" val="2034695615"/>
+      </p:ext>
+    </p:extLst>
+  </p:cSld>
+  <p:clrMapOvr>
+    <a:masterClrMapping/>
+  </p:clrMapOvr>
+  <p:timing>
+    <p:tnLst>
+      <p:par>
+        <p:cTn id="1" dur="indefinite" restart="never" nodeType="tmRoot"/>
+      </p:par>
+    </p:tnLst>
+  </p:timing>
+</p:sld>
+</file>
+
+<file path=ppt/slides/slide24.xml><?xml version="1.0" encoding="utf-8"?>
+<p:sld xmlns:a="http://schemas.openxmlformats.org/drawingml/2006/main" xmlns:r="http://schemas.openxmlformats.org/officeDocument/2006/relationships" xmlns:p="http://schemas.openxmlformats.org/presentationml/2006/main">
+  <p:cSld>
+    <p:spTree>
+      <p:nvGrpSpPr>
+        <p:cNvPr id="1" name=""/>
+        <p:cNvGrpSpPr/>
+        <p:nvPr/>
+      </p:nvGrpSpPr>
+      <p:grpSpPr>
+        <a:xfrm>
+          <a:off x="0" y="0"/>
+          <a:ext cx="0" cy="0"/>
+          <a:chOff x="0" y="0"/>
+          <a:chExt cx="0" cy="0"/>
+        </a:xfrm>
+      </p:grpSpPr>
+      <p:sp>
+        <p:nvSpPr>
+          <p:cNvPr id="2" name="제목 1"/>
+          <p:cNvSpPr>
+            <a:spLocks noGrp="1"/>
+          </p:cNvSpPr>
+          <p:nvPr>
+            <p:ph type="title"/>
+          </p:nvPr>
+        </p:nvSpPr>
+        <p:spPr>
+          <a:xfrm>
+            <a:off x="0" y="0"/>
+            <a:ext cx="12192000" cy="1457011"/>
+          </a:xfrm>
+        </p:spPr>
+        <p:txBody>
+          <a:bodyPr/>
+          <a:lstStyle/>
+          <a:p>
+            <a:r>
+              <a:rPr lang="en-US" altLang="ko-KR" b="1" dirty="0" smtClean="0"/>
+              <a:t> Result </a:t>
+            </a:r>
+            <a:r>
+              <a:rPr lang="en-US" altLang="ko-KR" b="1" dirty="0"/>
+              <a:t>Notes</a:t>
+            </a:r>
+            <a:endParaRPr lang="ko-KR" altLang="en-US" dirty="0"/>
+          </a:p>
+        </p:txBody>
+      </p:sp>
+      <p:sp>
+        <p:nvSpPr>
+          <p:cNvPr id="3" name="내용 개체 틀 2"/>
+          <p:cNvSpPr>
+            <a:spLocks noGrp="1"/>
+          </p:cNvSpPr>
+          <p:nvPr>
+            <p:ph idx="1"/>
+          </p:nvPr>
+        </p:nvSpPr>
+        <p:spPr>
+          <a:xfrm>
+            <a:off x="0" y="1245996"/>
+            <a:ext cx="11353800" cy="5612004"/>
+          </a:xfrm>
+        </p:spPr>
+        <p:txBody>
+          <a:bodyPr>
+            <a:normAutofit fontScale="92500" lnSpcReduction="10000"/>
+          </a:bodyPr>
+          <a:lstStyle/>
+          <a:p>
+            <a:r>
+              <a:rPr lang="en-US" altLang="ko-KR" dirty="0"/>
+              <a:t>Dashboard </a:t>
+            </a:r>
+            <a:r>
+              <a:rPr lang="ko-KR" altLang="en-US" dirty="0"/>
+              <a:t>를 통해 비정상 상태 파악 용이</a:t>
+            </a:r>
+            <a:endParaRPr lang="ko-KR" altLang="en-US" dirty="0">
+              <a:solidFill>
+                <a:srgbClr val="000000"/>
+              </a:solidFill>
+              <a:latin typeface="맑은 고딕" panose="020B0503020000020004" pitchFamily="50" charset="-127"/>
+            </a:endParaRPr>
+          </a:p>
+          <a:p>
+            <a:r>
+              <a:rPr lang="ko-KR" altLang="en-US" dirty="0"/>
+              <a:t>각 </a:t>
+            </a:r>
+            <a:r>
+              <a:rPr lang="en-US" altLang="ko-KR" dirty="0"/>
+              <a:t>Instance</a:t>
+            </a:r>
+            <a:r>
+              <a:rPr lang="ko-KR" altLang="en-US" dirty="0"/>
+              <a:t>의 </a:t>
+            </a:r>
+            <a:r>
+              <a:rPr lang="en-US" altLang="ko-KR" dirty="0"/>
+              <a:t>Resource </a:t>
+            </a:r>
+            <a:r>
+              <a:rPr lang="ko-KR" altLang="en-US" dirty="0"/>
+              <a:t>정보 파악 </a:t>
+            </a:r>
+            <a:r>
+              <a:rPr lang="ko-KR" altLang="en-US" dirty="0" smtClean="0"/>
+              <a:t>용이</a:t>
+            </a:r>
+            <a:endParaRPr lang="en-US" altLang="ko-KR" dirty="0" smtClean="0"/>
+          </a:p>
+          <a:p>
+            <a:pPr fontAlgn="ctr"/>
+            <a:r>
+              <a:rPr lang="en-US" altLang="ko-KR" dirty="0"/>
+              <a:t>Auto Session </a:t>
+            </a:r>
+            <a:r>
+              <a:rPr lang="en-US" altLang="ko-KR" dirty="0" err="1"/>
+              <a:t>Reocvery</a:t>
+            </a:r>
+            <a:r>
+              <a:rPr lang="en-US" altLang="ko-KR" dirty="0"/>
+              <a:t> </a:t>
+            </a:r>
+            <a:r>
+              <a:rPr lang="ko-KR" altLang="en-US" dirty="0"/>
+              <a:t>기능을 통해 </a:t>
+            </a:r>
+            <a:r>
+              <a:rPr lang="ko-KR" altLang="en-US" dirty="0" err="1"/>
+              <a:t>자동복구</a:t>
+            </a:r>
+            <a:r>
+              <a:rPr lang="en-US" altLang="ko-KR" dirty="0"/>
+              <a:t>.</a:t>
+            </a:r>
+            <a:endParaRPr lang="en-US" altLang="ko-KR" dirty="0">
+              <a:solidFill>
+                <a:srgbClr val="000000"/>
+              </a:solidFill>
+              <a:latin typeface="맑은 고딕" panose="020B0503020000020004" pitchFamily="50" charset="-127"/>
+            </a:endParaRPr>
+          </a:p>
+          <a:p>
+            <a:pPr fontAlgn="ctr"/>
+            <a:r>
+              <a:rPr lang="ko-KR" altLang="en-US" dirty="0"/>
+              <a:t>각 </a:t>
+            </a:r>
+            <a:r>
+              <a:rPr lang="en-US" altLang="ko-KR" dirty="0"/>
+              <a:t>Instance On/Off </a:t>
+            </a:r>
+            <a:r>
+              <a:rPr lang="ko-KR" altLang="en-US" dirty="0"/>
+              <a:t>제어</a:t>
+            </a:r>
+            <a:r>
+              <a:rPr lang="en-US" altLang="ko-KR" dirty="0"/>
+              <a:t>.</a:t>
+            </a:r>
+            <a:endParaRPr lang="en-US" altLang="ko-KR" dirty="0">
+              <a:solidFill>
+                <a:srgbClr val="000000"/>
+              </a:solidFill>
+              <a:latin typeface="맑은 고딕" panose="020B0503020000020004" pitchFamily="50" charset="-127"/>
+            </a:endParaRPr>
+          </a:p>
+          <a:p>
+            <a:r>
+              <a:rPr lang="en-US" altLang="ko-KR" dirty="0"/>
+              <a:t>Proxy </a:t>
+            </a:r>
+            <a:r>
+              <a:rPr lang="ko-KR" altLang="en-US" dirty="0"/>
+              <a:t>상태 파악 및 </a:t>
+            </a:r>
+            <a:r>
+              <a:rPr lang="en-US" altLang="ko-KR" dirty="0"/>
+              <a:t>Enable/Disable </a:t>
+            </a:r>
+            <a:r>
+              <a:rPr lang="ko-KR" altLang="en-US" dirty="0"/>
+              <a:t>제어</a:t>
+            </a:r>
+            <a:r>
+              <a:rPr lang="en-US" altLang="ko-KR" dirty="0"/>
+              <a:t>.</a:t>
+            </a:r>
+            <a:endParaRPr lang="en-US" altLang="ko-KR" dirty="0">
+              <a:solidFill>
+                <a:srgbClr val="000000"/>
+              </a:solidFill>
+              <a:latin typeface="맑은 고딕" panose="020B0503020000020004" pitchFamily="50" charset="-127"/>
+            </a:endParaRPr>
+          </a:p>
+          <a:p>
+            <a:pPr fontAlgn="ctr"/>
+            <a:r>
+              <a:rPr lang="en-US" altLang="ko-KR" dirty="0"/>
+              <a:t>Consumer </a:t>
+            </a:r>
+            <a:r>
+              <a:rPr lang="ko-KR" altLang="en-US" dirty="0"/>
+              <a:t>및 </a:t>
+            </a:r>
+            <a:r>
+              <a:rPr lang="en-US" altLang="ko-KR" dirty="0"/>
+              <a:t>Has Config </a:t>
+            </a:r>
+            <a:r>
+              <a:rPr lang="ko-KR" altLang="en-US" dirty="0"/>
+              <a:t>설정 및 </a:t>
+            </a:r>
+            <a:r>
+              <a:rPr lang="en-US" altLang="ko-KR" dirty="0"/>
+              <a:t>Deploy</a:t>
+            </a:r>
+            <a:endParaRPr lang="en-US" altLang="ko-KR" dirty="0">
+              <a:solidFill>
+                <a:srgbClr val="000000"/>
+              </a:solidFill>
+              <a:latin typeface="맑은 고딕" panose="020B0503020000020004" pitchFamily="50" charset="-127"/>
+            </a:endParaRPr>
+          </a:p>
+          <a:p>
+            <a:pPr fontAlgn="ctr"/>
+            <a:r>
+              <a:rPr lang="ko-KR" altLang="en-US" dirty="0"/>
+              <a:t>장비의 자세한 </a:t>
+            </a:r>
+            <a:r>
+              <a:rPr lang="ko-KR" altLang="en-US" dirty="0" err="1"/>
+              <a:t>전송상태</a:t>
+            </a:r>
+            <a:r>
+              <a:rPr lang="ko-KR" altLang="en-US" dirty="0"/>
+              <a:t> 파악 가능</a:t>
+            </a:r>
+            <a:r>
+              <a:rPr lang="en-US" altLang="ko-KR" dirty="0"/>
+              <a:t>.</a:t>
+            </a:r>
+            <a:endParaRPr lang="en-US" altLang="ko-KR" dirty="0">
+              <a:solidFill>
+                <a:srgbClr val="000000"/>
+              </a:solidFill>
+              <a:latin typeface="맑은 고딕" panose="020B0503020000020004" pitchFamily="50" charset="-127"/>
+            </a:endParaRPr>
+          </a:p>
+          <a:p>
+            <a:pPr fontAlgn="ctr"/>
+            <a:r>
+              <a:rPr lang="ko-KR" altLang="en-US" dirty="0"/>
+              <a:t>장비에서 </a:t>
+            </a:r>
+            <a:r>
+              <a:rPr lang="en-US" altLang="ko-KR" dirty="0"/>
+              <a:t>Consumer</a:t>
+            </a:r>
+            <a:r>
+              <a:rPr lang="ko-KR" altLang="en-US" dirty="0"/>
+              <a:t>로 보내는 각 </a:t>
+            </a:r>
+            <a:r>
+              <a:rPr lang="en-US" altLang="ko-KR" dirty="0"/>
+              <a:t>Data Tracking </a:t>
+            </a:r>
+            <a:r>
+              <a:rPr lang="ko-KR" altLang="en-US" dirty="0"/>
+              <a:t>가능</a:t>
+            </a:r>
+            <a:r>
+              <a:rPr lang="en-US" altLang="ko-KR" dirty="0"/>
+              <a:t>. </a:t>
+            </a:r>
+            <a:endParaRPr lang="en-US" altLang="ko-KR" dirty="0" smtClean="0"/>
+          </a:p>
+          <a:p>
+            <a:pPr fontAlgn="ctr"/>
+            <a:r>
+              <a:rPr lang="en-US" altLang="ko-KR" dirty="0" err="1"/>
+              <a:t>Svid</a:t>
+            </a:r>
+            <a:r>
+              <a:rPr lang="en-US" altLang="ko-KR" dirty="0"/>
+              <a:t> </a:t>
+            </a:r>
+            <a:r>
+              <a:rPr lang="ko-KR" altLang="en-US" dirty="0"/>
+              <a:t>기준으로 </a:t>
+            </a:r>
+            <a:r>
+              <a:rPr lang="en-US" altLang="ko-KR" dirty="0"/>
+              <a:t>Parameter </a:t>
+            </a:r>
+            <a:r>
+              <a:rPr lang="ko-KR" altLang="en-US" dirty="0"/>
+              <a:t>검색 가능</a:t>
+            </a:r>
+            <a:r>
+              <a:rPr lang="en-US" altLang="ko-KR" dirty="0"/>
+              <a:t>.</a:t>
+            </a:r>
+            <a:endParaRPr lang="en-US" altLang="ko-KR" dirty="0">
+              <a:solidFill>
+                <a:srgbClr val="000000"/>
+              </a:solidFill>
+              <a:latin typeface="맑은 고딕" panose="020B0503020000020004" pitchFamily="50" charset="-127"/>
+            </a:endParaRPr>
+          </a:p>
+          <a:p>
+            <a:pPr fontAlgn="ctr"/>
+            <a:r>
+              <a:rPr lang="en-US" altLang="ko-KR" dirty="0"/>
+              <a:t>Operation Log </a:t>
+            </a:r>
+            <a:r>
+              <a:rPr lang="ko-KR" altLang="en-US" dirty="0"/>
+              <a:t>검색 가능</a:t>
+            </a:r>
+            <a:r>
+              <a:rPr lang="en-US" altLang="ko-KR" dirty="0"/>
+              <a:t>.</a:t>
+            </a:r>
+            <a:endParaRPr lang="en-US" altLang="ko-KR" dirty="0">
+              <a:solidFill>
+                <a:srgbClr val="000000"/>
+              </a:solidFill>
+              <a:latin typeface="맑은 고딕" panose="020B0503020000020004" pitchFamily="50" charset="-127"/>
+            </a:endParaRPr>
+          </a:p>
+          <a:p>
+            <a:pPr fontAlgn="ctr"/>
+            <a:r>
+              <a:rPr lang="en-US" altLang="ko-KR" dirty="0"/>
+              <a:t>Abnormal History </a:t>
+            </a:r>
+            <a:r>
+              <a:rPr lang="ko-KR" altLang="en-US" dirty="0"/>
+              <a:t>검색 가능</a:t>
+            </a:r>
+            <a:r>
+              <a:rPr lang="en-US" altLang="ko-KR" dirty="0"/>
+              <a:t>.</a:t>
+            </a:r>
+            <a:endParaRPr lang="en-US" altLang="ko-KR" dirty="0">
+              <a:solidFill>
+                <a:srgbClr val="000000"/>
+              </a:solidFill>
+              <a:latin typeface="맑은 고딕" panose="020B0503020000020004" pitchFamily="50" charset="-127"/>
+            </a:endParaRPr>
+          </a:p>
+          <a:p>
+            <a:pPr fontAlgn="ctr"/>
+            <a:r>
+              <a:rPr lang="ko-KR" altLang="en-US" dirty="0"/>
+              <a:t>각 </a:t>
+            </a:r>
+            <a:r>
+              <a:rPr lang="ko-KR" altLang="en-US" dirty="0" err="1"/>
+              <a:t>유저별</a:t>
+            </a:r>
+            <a:r>
+              <a:rPr lang="ko-KR" altLang="en-US" dirty="0"/>
+              <a:t> </a:t>
+            </a:r>
+            <a:r>
+              <a:rPr lang="en-US" altLang="ko-KR" dirty="0"/>
+              <a:t>Group </a:t>
+            </a:r>
+            <a:r>
+              <a:rPr lang="ko-KR" altLang="en-US" dirty="0"/>
+              <a:t>권한 관리 가능</a:t>
+            </a:r>
+            <a:r>
+              <a:rPr lang="en-US" altLang="ko-KR" dirty="0"/>
+              <a:t>.</a:t>
+            </a:r>
+            <a:endParaRPr lang="en-US" altLang="ko-KR" dirty="0">
+              <a:solidFill>
+                <a:srgbClr val="000000"/>
+              </a:solidFill>
+              <a:latin typeface="맑은 고딕" panose="020B0503020000020004" pitchFamily="50" charset="-127"/>
+            </a:endParaRPr>
+          </a:p>
+          <a:p>
+            <a:pPr fontAlgn="ctr"/>
+            <a:endParaRPr lang="en-US" altLang="ko-KR" dirty="0">
+              <a:solidFill>
+                <a:srgbClr val="000000"/>
+              </a:solidFill>
+              <a:latin typeface="맑은 고딕" panose="020B0503020000020004" pitchFamily="50" charset="-127"/>
+            </a:endParaRPr>
+          </a:p>
+          <a:p>
+            <a:endParaRPr lang="en-US" altLang="ko-KR" dirty="0" smtClean="0"/>
+          </a:p>
+          <a:p>
+            <a:pPr marL="0" indent="0">
+              <a:buNone/>
+            </a:pPr>
+            <a:endParaRPr lang="en-US" altLang="ko-KR" dirty="0"/>
+          </a:p>
+          <a:p>
+            <a:pPr marL="0" indent="0">
+              <a:buNone/>
+            </a:pPr>
+            <a:endParaRPr lang="en-US" altLang="ko-KR" dirty="0" smtClean="0"/>
+          </a:p>
+          <a:p>
+            <a:endParaRPr lang="ko-KR" altLang="en-US" dirty="0"/>
+          </a:p>
+        </p:txBody>
+      </p:sp>
+    </p:spTree>
+    <p:extLst>
+      <p:ext uri="{BB962C8B-B14F-4D97-AF65-F5344CB8AC3E}">
+        <p14:creationId xmlns:p14="http://schemas.microsoft.com/office/powerpoint/2010/main" val="1866356164"/>
+      </p:ext>
+    </p:extLst>
+  </p:cSld>
+  <p:clrMapOvr>
+    <a:masterClrMapping/>
+  </p:clrMapOvr>
+  <p:timing>
+    <p:tnLst>
+      <p:par>
+        <p:cTn id="1" dur="indefinite" restart="never" nodeType="tmRoot"/>
+      </p:par>
+    </p:tnLst>
+  </p:timing>
+</p:sld>
+</file>
+
+<file path=ppt/slides/slide25.xml><?xml version="1.0" encoding="utf-8"?>
+<p:sld xmlns:a="http://schemas.openxmlformats.org/drawingml/2006/main" xmlns:r="http://schemas.openxmlformats.org/officeDocument/2006/relationships" xmlns:p="http://schemas.openxmlformats.org/presentationml/2006/main">
+  <p:cSld>
+    <p:spTree>
+      <p:nvGrpSpPr>
+        <p:cNvPr id="1" name=""/>
+        <p:cNvGrpSpPr/>
+        <p:nvPr/>
+      </p:nvGrpSpPr>
+      <p:grpSpPr>
+        <a:xfrm>
+          <a:off x="0" y="0"/>
+          <a:ext cx="0" cy="0"/>
+          <a:chOff x="0" y="0"/>
+          <a:chExt cx="0" cy="0"/>
+        </a:xfrm>
+      </p:grpSpPr>
+      <p:sp>
+        <p:nvSpPr>
+          <p:cNvPr id="2" name="제목 1"/>
+          <p:cNvSpPr>
+            <a:spLocks noGrp="1"/>
+          </p:cNvSpPr>
+          <p:nvPr>
+            <p:ph type="title"/>
+          </p:nvPr>
+        </p:nvSpPr>
+        <p:spPr>
+          <a:xfrm>
+            <a:off x="0" y="0"/>
+            <a:ext cx="12192000" cy="1115367"/>
+          </a:xfrm>
+        </p:spPr>
+        <p:txBody>
+          <a:bodyPr/>
+          <a:lstStyle/>
+          <a:p>
+            <a:r>
+              <a:rPr lang="en-US" altLang="ko-KR" b="1" dirty="0" smtClean="0"/>
+              <a:t> Result </a:t>
+            </a:r>
+            <a:r>
+              <a:rPr lang="en-US" altLang="ko-KR" b="1" dirty="0"/>
+              <a:t>Notes</a:t>
+            </a:r>
+            <a:endParaRPr lang="ko-KR" altLang="en-US" dirty="0"/>
+          </a:p>
+        </p:txBody>
+      </p:sp>
+      <p:sp>
+        <p:nvSpPr>
+          <p:cNvPr id="3" name="내용 개체 틀 2"/>
+          <p:cNvSpPr>
+            <a:spLocks noGrp="1"/>
+          </p:cNvSpPr>
+          <p:nvPr>
+            <p:ph idx="1"/>
+          </p:nvPr>
+        </p:nvSpPr>
+        <p:spPr>
+          <a:xfrm>
+            <a:off x="0" y="1245996"/>
+            <a:ext cx="11353800" cy="5612004"/>
+          </a:xfrm>
+        </p:spPr>
+        <p:txBody>
+          <a:bodyPr>
+            <a:normAutofit/>
+          </a:bodyPr>
+          <a:lstStyle/>
+          <a:p>
+            <a:r>
+              <a:rPr lang="ko-KR" altLang="en-US" dirty="0" smtClean="0"/>
+              <a:t>현업들이 고도화 버전의 </a:t>
+            </a:r>
+            <a:r>
+              <a:rPr lang="en-US" altLang="ko-KR" dirty="0" err="1" smtClean="0"/>
+              <a:t>AutoSessionRecovery</a:t>
+            </a:r>
+            <a:r>
+              <a:rPr lang="en-US" altLang="ko-KR" dirty="0" smtClean="0"/>
+              <a:t>, </a:t>
+            </a:r>
+            <a:r>
+              <a:rPr lang="ko-KR" altLang="en-US" dirty="0" err="1" smtClean="0"/>
+              <a:t>통합알림</a:t>
+            </a:r>
+            <a:r>
+              <a:rPr lang="ko-KR" altLang="en-US" dirty="0" smtClean="0"/>
+              <a:t> 기능 등이 있어 고도화 버전을 희망</a:t>
+            </a:r>
+            <a:r>
+              <a:rPr lang="en-US" altLang="ko-KR" dirty="0" smtClean="0"/>
+              <a:t>.</a:t>
+            </a:r>
+          </a:p>
+          <a:p>
+            <a:r>
+              <a:rPr lang="en-US" altLang="ko-KR" dirty="0">
+                <a:solidFill>
+                  <a:srgbClr val="000000"/>
+                </a:solidFill>
+                <a:latin typeface="맑은 고딕" panose="020B0503020000020004" pitchFamily="50" charset="-127"/>
+              </a:rPr>
+              <a:t> </a:t>
+            </a:r>
+            <a:r>
+              <a:rPr lang="en-US" altLang="ko-KR" dirty="0" smtClean="0">
+                <a:solidFill>
+                  <a:srgbClr val="000000"/>
+                </a:solidFill>
+                <a:latin typeface="맑은 고딕" panose="020B0503020000020004" pitchFamily="50" charset="-127"/>
+              </a:rPr>
+              <a:t>-&gt;</a:t>
+            </a:r>
+            <a:r>
+              <a:rPr lang="ko-KR" altLang="en-US" dirty="0" smtClean="0">
+                <a:solidFill>
+                  <a:srgbClr val="000000"/>
+                </a:solidFill>
+                <a:latin typeface="맑은 고딕" panose="020B0503020000020004" pitchFamily="50" charset="-127"/>
+              </a:rPr>
+              <a:t>최초 계약보다 </a:t>
+            </a:r>
+            <a:r>
+              <a:rPr lang="en-US" altLang="ko-KR" dirty="0" smtClean="0">
+                <a:solidFill>
+                  <a:srgbClr val="000000"/>
+                </a:solidFill>
+                <a:latin typeface="맑은 고딕" panose="020B0503020000020004" pitchFamily="50" charset="-127"/>
+              </a:rPr>
+              <a:t>300%</a:t>
+            </a:r>
+            <a:r>
+              <a:rPr lang="ko-KR" altLang="en-US" dirty="0" smtClean="0">
+                <a:solidFill>
+                  <a:srgbClr val="000000"/>
+                </a:solidFill>
+                <a:latin typeface="맑은 고딕" panose="020B0503020000020004" pitchFamily="50" charset="-127"/>
+              </a:rPr>
+              <a:t> 더 계약</a:t>
+            </a:r>
+            <a:r>
+              <a:rPr lang="en-US" altLang="ko-KR" dirty="0" smtClean="0">
+                <a:solidFill>
+                  <a:srgbClr val="000000"/>
+                </a:solidFill>
+                <a:latin typeface="맑은 고딕" panose="020B0503020000020004" pitchFamily="50" charset="-127"/>
+              </a:rPr>
+              <a:t>.</a:t>
+            </a:r>
+          </a:p>
+          <a:p>
+            <a:r>
+              <a:rPr lang="en-US" altLang="ko-KR" dirty="0" smtClean="0">
+                <a:solidFill>
+                  <a:srgbClr val="000000"/>
+                </a:solidFill>
+                <a:latin typeface="맑은 고딕" panose="020B0503020000020004" pitchFamily="50" charset="-127"/>
+              </a:rPr>
+              <a:t>PM </a:t>
+            </a:r>
+            <a:r>
+              <a:rPr lang="ko-KR" altLang="en-US" dirty="0" smtClean="0">
+                <a:solidFill>
+                  <a:srgbClr val="000000"/>
+                </a:solidFill>
+                <a:latin typeface="맑은 고딕" panose="020B0503020000020004" pitchFamily="50" charset="-127"/>
+              </a:rPr>
+              <a:t>시 걸리는 시간 단축</a:t>
+            </a:r>
+            <a:endParaRPr lang="en-US" altLang="ko-KR" dirty="0" smtClean="0">
+              <a:solidFill>
+                <a:srgbClr val="000000"/>
+              </a:solidFill>
+              <a:latin typeface="맑은 고딕" panose="020B0503020000020004" pitchFamily="50" charset="-127"/>
+            </a:endParaRPr>
+          </a:p>
+          <a:p>
+            <a:pPr marL="0" indent="0">
+              <a:buNone/>
+            </a:pPr>
+            <a:r>
+              <a:rPr lang="en-US" altLang="ko-KR" dirty="0" smtClean="0">
+                <a:solidFill>
+                  <a:srgbClr val="000000"/>
+                </a:solidFill>
+                <a:latin typeface="맑은 고딕" panose="020B0503020000020004" pitchFamily="50" charset="-127"/>
+              </a:rPr>
+              <a:t>  -&gt; 1</a:t>
+            </a:r>
+            <a:r>
+              <a:rPr lang="ko-KR" altLang="en-US" dirty="0" smtClean="0">
+                <a:solidFill>
+                  <a:srgbClr val="000000"/>
+                </a:solidFill>
+                <a:latin typeface="맑은 고딕" panose="020B0503020000020004" pitchFamily="50" charset="-127"/>
+              </a:rPr>
+              <a:t>시간 </a:t>
+            </a:r>
+            <a:r>
+              <a:rPr lang="en-US" altLang="ko-KR" dirty="0" smtClean="0">
+                <a:solidFill>
+                  <a:srgbClr val="000000"/>
+                </a:solidFill>
+                <a:latin typeface="맑은 고딕" panose="020B0503020000020004" pitchFamily="50" charset="-127"/>
+              </a:rPr>
+              <a:t>20</a:t>
+            </a:r>
+            <a:r>
+              <a:rPr lang="ko-KR" altLang="en-US" dirty="0" smtClean="0">
+                <a:solidFill>
+                  <a:srgbClr val="000000"/>
+                </a:solidFill>
+                <a:latin typeface="맑은 고딕" panose="020B0503020000020004" pitchFamily="50" charset="-127"/>
+              </a:rPr>
+              <a:t>분 단축 </a:t>
+            </a:r>
+            <a:r>
+              <a:rPr lang="en-US" altLang="ko-KR" dirty="0" smtClean="0">
+                <a:solidFill>
+                  <a:srgbClr val="000000"/>
+                </a:solidFill>
+                <a:latin typeface="맑은 고딕" panose="020B0503020000020004" pitchFamily="50" charset="-127"/>
+              </a:rPr>
+              <a:t>/ 1</a:t>
+            </a:r>
+            <a:r>
+              <a:rPr lang="ko-KR" altLang="en-US" dirty="0" smtClean="0">
+                <a:solidFill>
+                  <a:srgbClr val="000000"/>
+                </a:solidFill>
+                <a:latin typeface="맑은 고딕" panose="020B0503020000020004" pitchFamily="50" charset="-127"/>
+              </a:rPr>
+              <a:t>시간</a:t>
+            </a:r>
+            <a:r>
+              <a:rPr lang="en-US" altLang="ko-KR" dirty="0" smtClean="0">
+                <a:solidFill>
+                  <a:srgbClr val="000000"/>
+                </a:solidFill>
+                <a:latin typeface="맑은 고딕" panose="020B0503020000020004" pitchFamily="50" charset="-127"/>
+              </a:rPr>
+              <a:t>30</a:t>
+            </a:r>
+            <a:r>
+              <a:rPr lang="ko-KR" altLang="en-US" dirty="0" smtClean="0">
+                <a:solidFill>
+                  <a:srgbClr val="000000"/>
+                </a:solidFill>
+                <a:latin typeface="맑은 고딕" panose="020B0503020000020004" pitchFamily="50" charset="-127"/>
+              </a:rPr>
+              <a:t>분 </a:t>
+            </a:r>
+            <a:r>
+              <a:rPr lang="en-US" altLang="ko-KR" dirty="0" smtClean="0">
+                <a:solidFill>
+                  <a:srgbClr val="000000"/>
+                </a:solidFill>
+                <a:latin typeface="맑은 고딕" panose="020B0503020000020004" pitchFamily="50" charset="-127"/>
+              </a:rPr>
+              <a:t>&gt; 10</a:t>
+            </a:r>
+            <a:r>
+              <a:rPr lang="ko-KR" altLang="en-US" dirty="0" smtClean="0">
+                <a:solidFill>
+                  <a:srgbClr val="000000"/>
+                </a:solidFill>
+                <a:latin typeface="맑은 고딕" panose="020B0503020000020004" pitchFamily="50" charset="-127"/>
+              </a:rPr>
+              <a:t>분 </a:t>
+            </a:r>
+            <a:endParaRPr lang="en-US" altLang="ko-KR" dirty="0" smtClean="0">
+              <a:solidFill>
+                <a:srgbClr val="000000"/>
+              </a:solidFill>
+              <a:latin typeface="맑은 고딕" panose="020B0503020000020004" pitchFamily="50" charset="-127"/>
+            </a:endParaRPr>
+          </a:p>
+          <a:p>
+            <a:r>
+              <a:rPr lang="ko-KR" altLang="en-US" dirty="0" smtClean="0">
+                <a:solidFill>
+                  <a:srgbClr val="000000"/>
+                </a:solidFill>
+                <a:latin typeface="맑은 고딕" panose="020B0503020000020004" pitchFamily="50" charset="-127"/>
+              </a:rPr>
+              <a:t>이상 데이터 발생 시 </a:t>
+            </a:r>
+            <a:r>
+              <a:rPr lang="en-US" altLang="ko-KR" dirty="0" smtClean="0">
+                <a:solidFill>
+                  <a:srgbClr val="000000"/>
+                </a:solidFill>
+                <a:latin typeface="맑은 고딕" panose="020B0503020000020004" pitchFamily="50" charset="-127"/>
+              </a:rPr>
+              <a:t>Log </a:t>
+            </a:r>
+            <a:r>
+              <a:rPr lang="ko-KR" altLang="en-US" dirty="0" smtClean="0">
+                <a:solidFill>
+                  <a:srgbClr val="000000"/>
+                </a:solidFill>
+                <a:latin typeface="맑은 고딕" panose="020B0503020000020004" pitchFamily="50" charset="-127"/>
+              </a:rPr>
+              <a:t>데이터 확인 용이</a:t>
+            </a:r>
+            <a:endParaRPr lang="en-US" altLang="ko-KR" dirty="0" smtClean="0">
+              <a:solidFill>
+                <a:srgbClr val="000000"/>
+              </a:solidFill>
+              <a:latin typeface="맑은 고딕" panose="020B0503020000020004" pitchFamily="50" charset="-127"/>
+            </a:endParaRPr>
+          </a:p>
+          <a:p>
+            <a:pPr marL="0" indent="0">
+              <a:buNone/>
+            </a:pPr>
+            <a:r>
+              <a:rPr lang="en-US" altLang="ko-KR" dirty="0">
+                <a:solidFill>
+                  <a:srgbClr val="000000"/>
+                </a:solidFill>
+                <a:latin typeface="맑은 고딕" panose="020B0503020000020004" pitchFamily="50" charset="-127"/>
+              </a:rPr>
+              <a:t>  </a:t>
+            </a:r>
+            <a:r>
+              <a:rPr lang="en-US" altLang="ko-KR" dirty="0" smtClean="0">
+                <a:solidFill>
+                  <a:srgbClr val="000000"/>
+                </a:solidFill>
+                <a:latin typeface="맑은 고딕" panose="020B0503020000020004" pitchFamily="50" charset="-127"/>
+              </a:rPr>
+              <a:t>-&gt; </a:t>
+            </a:r>
+            <a:r>
+              <a:rPr lang="ko-KR" altLang="en-US" dirty="0" smtClean="0">
+                <a:solidFill>
+                  <a:srgbClr val="000000"/>
+                </a:solidFill>
+                <a:latin typeface="맑은 고딕" panose="020B0503020000020004" pitchFamily="50" charset="-127"/>
+              </a:rPr>
+              <a:t>각 서버의 </a:t>
+            </a:r>
+            <a:r>
+              <a:rPr lang="en-US" altLang="ko-KR" dirty="0" smtClean="0">
+                <a:solidFill>
+                  <a:srgbClr val="000000"/>
+                </a:solidFill>
+                <a:latin typeface="맑은 고딕" panose="020B0503020000020004" pitchFamily="50" charset="-127"/>
+              </a:rPr>
+              <a:t>Log </a:t>
+            </a:r>
+            <a:r>
+              <a:rPr lang="ko-KR" altLang="en-US" dirty="0" smtClean="0">
+                <a:solidFill>
+                  <a:srgbClr val="000000"/>
+                </a:solidFill>
+                <a:latin typeface="맑은 고딕" panose="020B0503020000020004" pitchFamily="50" charset="-127"/>
+              </a:rPr>
+              <a:t>파일을 하나하나 찾아서 눈으로 비교 </a:t>
+            </a:r>
+            <a:r>
+              <a:rPr lang="en-US" altLang="ko-KR" dirty="0" smtClean="0">
+                <a:solidFill>
+                  <a:srgbClr val="000000"/>
+                </a:solidFill>
+                <a:latin typeface="맑은 고딕" panose="020B0503020000020004" pitchFamily="50" charset="-127"/>
+              </a:rPr>
+              <a:t>/ </a:t>
+            </a:r>
+            <a:r>
+              <a:rPr lang="ko-KR" altLang="en-US" dirty="0" smtClean="0">
+                <a:solidFill>
+                  <a:srgbClr val="000000"/>
+                </a:solidFill>
+                <a:latin typeface="맑은 고딕" panose="020B0503020000020004" pitchFamily="50" charset="-127"/>
+              </a:rPr>
+              <a:t>클릭 한번으로 </a:t>
+            </a:r>
+            <a:r>
+              <a:rPr lang="en-US" altLang="ko-KR" dirty="0" smtClean="0">
+                <a:solidFill>
+                  <a:srgbClr val="000000"/>
+                </a:solidFill>
+                <a:latin typeface="맑은 고딕" panose="020B0503020000020004" pitchFamily="50" charset="-127"/>
+              </a:rPr>
+              <a:t>Log</a:t>
+            </a:r>
+            <a:r>
+              <a:rPr lang="ko-KR" altLang="en-US" dirty="0" smtClean="0">
+                <a:solidFill>
+                  <a:srgbClr val="000000"/>
+                </a:solidFill>
+                <a:latin typeface="맑은 고딕" panose="020B0503020000020004" pitchFamily="50" charset="-127"/>
+              </a:rPr>
+              <a:t>데이터 파악 가능</a:t>
+            </a:r>
+            <a:r>
+              <a:rPr lang="en-US" altLang="ko-KR" dirty="0" smtClean="0">
+                <a:solidFill>
+                  <a:srgbClr val="000000"/>
+                </a:solidFill>
+                <a:latin typeface="맑은 고딕" panose="020B0503020000020004" pitchFamily="50" charset="-127"/>
+              </a:rPr>
+              <a:t>.</a:t>
+            </a:r>
+            <a:endParaRPr lang="en-US" altLang="ko-KR" dirty="0">
+              <a:solidFill>
+                <a:srgbClr val="000000"/>
+              </a:solidFill>
+              <a:latin typeface="맑은 고딕" panose="020B0503020000020004" pitchFamily="50" charset="-127"/>
+            </a:endParaRPr>
+          </a:p>
+          <a:p>
+            <a:endParaRPr lang="en-US" altLang="ko-KR" dirty="0" smtClean="0">
+              <a:solidFill>
+                <a:srgbClr val="000000"/>
+              </a:solidFill>
+              <a:latin typeface="맑은 고딕" panose="020B0503020000020004" pitchFamily="50" charset="-127"/>
+            </a:endParaRPr>
+          </a:p>
+          <a:p>
+            <a:pPr marL="0" indent="0">
+              <a:buNone/>
+            </a:pPr>
+            <a:endParaRPr lang="en-US" altLang="ko-KR" dirty="0">
+              <a:solidFill>
+                <a:srgbClr val="000000"/>
+              </a:solidFill>
+              <a:latin typeface="맑은 고딕" panose="020B0503020000020004" pitchFamily="50" charset="-127"/>
+            </a:endParaRPr>
+          </a:p>
+          <a:p>
+            <a:endParaRPr lang="en-US" altLang="ko-KR" dirty="0" smtClean="0"/>
+          </a:p>
+          <a:p>
+            <a:pPr marL="0" indent="0">
+              <a:buNone/>
+            </a:pPr>
+            <a:endParaRPr lang="en-US" altLang="ko-KR" dirty="0"/>
+          </a:p>
+          <a:p>
+            <a:pPr marL="0" indent="0">
+              <a:buNone/>
+            </a:pPr>
+            <a:endParaRPr lang="en-US" altLang="ko-KR" dirty="0" smtClean="0"/>
+          </a:p>
+          <a:p>
+            <a:endParaRPr lang="ko-KR" altLang="en-US" dirty="0"/>
+          </a:p>
+        </p:txBody>
+      </p:sp>
+    </p:spTree>
+    <p:extLst>
+      <p:ext uri="{BB962C8B-B14F-4D97-AF65-F5344CB8AC3E}">
+        <p14:creationId xmlns:p14="http://schemas.microsoft.com/office/powerpoint/2010/main" val="502455803"/>
       </p:ext>
     </p:extLst>
   </p:cSld>
